--- a/classes/parte-12-osint-e-ingenieria-social/259-defensa-contra-la-ingenieria-social/clase-259-presentacion.pptx
+++ b/classes/parte-12-osint-e-ingenieria-social/259-defensa-contra-la-ingenieria-social/clase-259-presentacion.pptx
@@ -3497,6 +3497,21 @@
               <a:t>•  Elabora un playbook de contención para credenciales comprometidas.</a:t>
             </a:r>
           </a:p>
+          <a:p>
+            <a:pPr>
+              <a:spcAft>
+                <a:spcPts val="600"/>
+              </a:spcAft>
+            </a:pPr>
+            <a:r>
+              <a:rPr sz="1500">
+                <a:solidFill>
+                  <a:srgbClr val="22282E"/>
+                </a:solidFill>
+              </a:rPr>
+              <a:t>•  Compara la respuesta a cuatro hechos: approval firmado, seed expuesta, clipboard sustituido y retiro de liquidez. Explica por qué una única acción no sirve para los cuatro.</a:t>
+            </a:r>
+          </a:p>
         </p:txBody>
       </p:sp>
     </p:spTree>
@@ -3643,7 +3658,22 @@
                   <a:srgbClr val="22282E"/>
                 </a:solidFill>
               </a:rPr>
-              <a:t>•  cada vector (phishing, vishing, pretexting) y métricas que midan resiliencia, no solo víctimas.</a:t>
+              <a:t>•  cada vector (phishing, vishing, pretexting y lanzamiento viral) y métricas que midan resiliencia, no</a:t>
+            </a:r>
+          </a:p>
+          <a:p>
+            <a:pPr>
+              <a:spcAft>
+                <a:spcPts val="600"/>
+              </a:spcAft>
+            </a:pPr>
+            <a:r>
+              <a:rPr sz="1500">
+                <a:solidFill>
+                  <a:srgbClr val="22282E"/>
+                </a:solidFill>
+              </a:rPr>
+              <a:t>•  solo víctimas. Para el caso viral debe separar conexión, firma/permiso, secreto y efecto observado.</a:t>
             </a:r>
           </a:p>
         </p:txBody>
@@ -3795,6 +3825,36 @@
               <a:t>•  Helpdesk resetea sin validar — Falta verificación fuera de banda. Implanta preguntas y canal alternativo.</a:t>
             </a:r>
           </a:p>
+          <a:p>
+            <a:pPr>
+              <a:spcAft>
+                <a:spcPts val="600"/>
+              </a:spcAft>
+            </a:pPr>
+            <a:r>
+              <a:rPr sz="1500">
+                <a:solidFill>
+                  <a:srgbClr val="22282E"/>
+                </a:solidFill>
+              </a:rPr>
+              <a:t>•  «El candado prueba que el airdrop es oficial» — TLS protege el canal al dominio visitado; corrobora dominio, cuenta y activo por vías independientes.</a:t>
+            </a:r>
+          </a:p>
+          <a:p>
+            <a:pPr>
+              <a:spcAft>
+                <a:spcPts val="600"/>
+              </a:spcAft>
+            </a:pPr>
+            <a:r>
+              <a:rPr sz="1500">
+                <a:solidFill>
+                  <a:srgbClr val="22282E"/>
+                </a:solidFill>
+              </a:rPr>
+              <a:t>•  «Conectar drenó la wallet» — Busca la firma, permiso, transacción o secreto que creó capacidad; la conexión puede no cambiar estado.</a:t>
+            </a:r>
+          </a:p>
         </p:txBody>
       </p:sp>
     </p:spTree>
@@ -4136,6 +4196,21 @@
                 </a:solidFill>
               </a:rPr>
               <a:t>•  NIST SP 800-63B-4 — Authenticator and Verifier Requirements. &lt;https://pages.nist.gov/800-63-4/sp800-63b/authenticators/&gt;</a:t>
+            </a:r>
+          </a:p>
+          <a:p>
+            <a:pPr>
+              <a:spcAft>
+                <a:spcPts val="600"/>
+              </a:spcAft>
+            </a:pPr>
+            <a:r>
+              <a:rPr sz="1500">
+                <a:solidFill>
+                  <a:srgbClr val="22282E"/>
+                </a:solidFill>
+              </a:rPr>
+              <a:t>•  MetaMask — What is a token approval?: permisos de gasto, approvals maliciosos y revocación en ese ecosistema. &lt;https://support.metamask.io/stay-safe/safety-in-web3/what-is-a-token-approval/&gt;</a:t>
             </a:r>
           </a:p>
         </p:txBody>
@@ -4511,6 +4586,21 @@
               <a:t>•  Definir un flujo de reporte y respuesta ante incidentes de ingeniería social.</a:t>
             </a:r>
           </a:p>
+          <a:p>
+            <a:pPr>
+              <a:spcAft>
+                <a:spcPts val="600"/>
+              </a:spcAft>
+            </a:pPr>
+            <a:r>
+              <a:rPr sz="1500">
+                <a:solidFill>
+                  <a:srgbClr val="22282E"/>
+                </a:solidFill>
+              </a:rPr>
+              <a:t>•  Descomponer un lanzamiento viral en identidad, origen, secreto, autorización y efecto para aplicar controles específicos.</a:t>
+            </a:r>
+          </a:p>
         </p:txBody>
       </p:sp>
     </p:spTree>
@@ -4836,7 +4926,37 @@
                   <a:srgbClr val="22282E"/>
                 </a:solidFill>
               </a:rPr>
-              <a:t>•  Una víctima entrega contraseña y OTP a un proxy en tiempo real. El atacante obtiene sesión. La organización no concluye que «MFA no sirve»; identifica que ese autenticador no era resistente al…</a:t>
+              <a:t>•  Un lanzamiento viral combina palancas conocidas —autoridad aparente, prueba social, escasez, urgencia</a:t>
+            </a:r>
+          </a:p>
+          <a:p>
+            <a:pPr>
+              <a:spcAft>
+                <a:spcPts val="600"/>
+              </a:spcAft>
+            </a:pPr>
+            <a:r>
+              <a:rPr sz="1500">
+                <a:solidFill>
+                  <a:srgbClr val="22282E"/>
+                </a:solidFill>
+              </a:rPr>
+              <a:t>•  y recompensa— con una interfaz técnica poco familiar. El usuario ve un video, busca el token, llega a</a:t>
+            </a:r>
+          </a:p>
+          <a:p>
+            <a:pPr>
+              <a:spcAft>
+                <a:spcPts val="600"/>
+              </a:spcAft>
+            </a:pPr>
+            <a:r>
+              <a:rPr sz="1500">
+                <a:solidFill>
+                  <a:srgbClr val="22282E"/>
+                </a:solidFill>
+              </a:rPr>
+              <a:t>•  un dominio parecido, encuentra cuentas que se refuerzan entre sí y recibe un airdrop. La defensa no</a:t>
             </a:r>
           </a:p>
         </p:txBody>
@@ -5003,6 +5123,21 @@
               <a:t>•  Triage — Clasificación inicial que determina alcance, urgencia y respuesta.</a:t>
             </a:r>
           </a:p>
+          <a:p>
+            <a:pPr>
+              <a:spcAft>
+                <a:spcPts val="600"/>
+              </a:spcAft>
+            </a:pPr>
+            <a:r>
+              <a:rPr sz="1500">
+                <a:solidFill>
+                  <a:srgbClr val="22282E"/>
+                </a:solidFill>
+              </a:rPr>
+              <a:t>•  Approval / permiso — Autoridad concedida a un tercero para actuar sobre un activo según el protocolo.</a:t>
+            </a:r>
+          </a:p>
         </p:txBody>
       </p:sp>
     </p:spTree>
@@ -5254,6 +5389,21 @@
                 </a:solidFill>
               </a:rPr>
               <a:t>•  Playbook de respuesta: guía de acciones ante un incidente. Característica: reduce el tiempo de contención.</a:t>
+            </a:r>
+          </a:p>
+          <a:p>
+            <a:pPr>
+              <a:spcAft>
+                <a:spcPts val="600"/>
+              </a:spcAft>
+            </a:pPr>
+            <a:r>
+              <a:rPr sz="1500">
+                <a:solidFill>
+                  <a:srgbClr val="22282E"/>
+                </a:solidFill>
+              </a:rPr>
+              <a:t>•  Verificación del activo: comparación de red e identificador canónico, no solo nombre o símbolo. Característica: detecta tokens imitadores.</a:t>
             </a:r>
           </a:p>
         </p:txBody>
